--- a/강의자료/08차시_for_while_break.pptx
+++ b/강의자료/08차시_for_while_break.pptx
@@ -6708,12 +6708,12 @@
         </p:nvSpPr>
         <p:spPr>
           <a:xfrm>
-            <a:off x="457200" y="3429000"/>
-            <a:ext cx="8229600" cy="1234440"/>
+            <a:off x="457200" y="3108960"/>
+            <a:ext cx="8229600" cy="1554480"/>
           </a:xfrm>
           <a:prstGeom prst="roundRect">
             <a:avLst>
-              <a:gd name="adj" fmla="val 5926"/>
+              <a:gd name="adj" fmla="val 4706"/>
             </a:avLst>
           </a:prstGeom>
           <a:solidFill>
@@ -6735,8 +6735,8 @@
         </p:nvSpPr>
         <p:spPr>
           <a:xfrm>
-            <a:off x="621792" y="3538728"/>
-            <a:ext cx="7900416" cy="1014984"/>
+            <a:off x="621792" y="3218688"/>
+            <a:ext cx="7900416" cy="1335024"/>
           </a:xfrm>
           <a:prstGeom prst="rect">
             <a:avLst/>
@@ -6755,7 +6755,7 @@
               <a:buNone/>
             </a:pPr>
             <a:r>
-              <a:rPr lang="en-US" sz="1459" dirty="0">
+              <a:rPr lang="en-US" sz="1600" dirty="0">
                 <a:solidFill>
                   <a:srgbClr val="E5E7EB"/>
                 </a:solidFill>
@@ -6771,17 +6771,17 @@
               </a:lnSpc>
               <a:buNone/>
             </a:pPr>
-            <a:endParaRPr lang="en-US" sz="1459" dirty="0"/>
-          </a:p>
-          <a:p>
-            <a:pPr indent="0" marL="0">
-              <a:lnSpc>
-                <a:spcPct val="115000"/>
-              </a:lnSpc>
-              <a:buNone/>
-            </a:pPr>
-            <a:r>
-              <a:rPr lang="en-US" sz="1459" b="1" dirty="0">
+            <a:endParaRPr lang="en-US" sz="1600" dirty="0"/>
+          </a:p>
+          <a:p>
+            <a:pPr indent="0" marL="0">
+              <a:lnSpc>
+                <a:spcPct val="115000"/>
+              </a:lnSpc>
+              <a:buNone/>
+            </a:pPr>
+            <a:r>
+              <a:rPr lang="en-US" sz="1600" b="1" dirty="0">
                 <a:solidFill>
                   <a:srgbClr val="93C5FD"/>
                 </a:solidFill>
@@ -6798,7 +6798,7 @@
               <a:buNone/>
             </a:pPr>
             <a:r>
-              <a:rPr lang="en-US" sz="1459" dirty="0">
+              <a:rPr lang="en-US" sz="1600" dirty="0">
                 <a:solidFill>
                   <a:srgbClr val="E5E7EB"/>
                 </a:solidFill>
@@ -6814,17 +6814,17 @@
               </a:lnSpc>
               <a:buNone/>
             </a:pPr>
-            <a:endParaRPr lang="en-US" sz="1459" dirty="0"/>
-          </a:p>
-          <a:p>
-            <a:pPr indent="0" marL="0">
-              <a:lnSpc>
-                <a:spcPct val="115000"/>
-              </a:lnSpc>
-              <a:buNone/>
-            </a:pPr>
-            <a:r>
-              <a:rPr lang="en-US" sz="1459" dirty="0">
+            <a:endParaRPr lang="en-US" sz="1600" dirty="0"/>
+          </a:p>
+          <a:p>
+            <a:pPr indent="0" marL="0">
+              <a:lnSpc>
+                <a:spcPct val="115000"/>
+              </a:lnSpc>
+              <a:buNone/>
+            </a:pPr>
+            <a:r>
+              <a:rPr lang="en-US" sz="1600" dirty="0">
                 <a:solidFill>
                   <a:srgbClr val="E5E7EB"/>
                 </a:solidFill>
@@ -6841,7 +6841,7 @@
               <a:buNone/>
             </a:pPr>
             <a:r>
-              <a:rPr lang="en-US" sz="1459" b="1" dirty="0">
+              <a:rPr lang="en-US" sz="1600" b="1" dirty="0">
                 <a:solidFill>
                   <a:srgbClr val="93C5FD"/>
                 </a:solidFill>
@@ -6858,7 +6858,7 @@
               <a:buNone/>
             </a:pPr>
             <a:r>
-              <a:rPr lang="en-US" sz="1459" dirty="0">
+              <a:rPr lang="en-US" sz="1600" dirty="0">
                 <a:solidFill>
                   <a:srgbClr val="E5E7EB"/>
                 </a:solidFill>
@@ -6874,17 +6874,17 @@
               </a:lnSpc>
               <a:buNone/>
             </a:pPr>
-            <a:endParaRPr lang="en-US" sz="1459" dirty="0"/>
-          </a:p>
-          <a:p>
-            <a:pPr indent="0" marL="0">
-              <a:lnSpc>
-                <a:spcPct val="115000"/>
-              </a:lnSpc>
-              <a:buNone/>
-            </a:pPr>
-            <a:r>
-              <a:rPr lang="en-US" sz="1459" dirty="0">
+            <a:endParaRPr lang="en-US" sz="1600" dirty="0"/>
+          </a:p>
+          <a:p>
+            <a:pPr indent="0" marL="0">
+              <a:lnSpc>
+                <a:spcPct val="115000"/>
+              </a:lnSpc>
+              <a:buNone/>
+            </a:pPr>
+            <a:r>
+              <a:rPr lang="en-US" sz="1600" dirty="0">
                 <a:solidFill>
                   <a:srgbClr val="E5E7EB"/>
                 </a:solidFill>
@@ -6894,7 +6894,7 @@
               </a:rPr>
               <a:t>    # n += 1 을 잊으면 0이 무한히 찍힌다</a:t>
             </a:r>
-            <a:endParaRPr lang="en-US" sz="1459" dirty="0"/>
+            <a:endParaRPr lang="en-US" sz="1600" dirty="0"/>
           </a:p>
         </p:txBody>
       </p:sp>

--- a/강의자료/08차시_for_while_break.pptx
+++ b/강의자료/08차시_for_while_break.pptx
@@ -6377,7 +6377,7 @@
         <p:spPr>
           <a:xfrm>
             <a:off x="457200" y="1965960"/>
-            <a:ext cx="2590800" cy="1097280"/>
+            <a:ext cx="2590800" cy="1417320"/>
           </a:xfrm>
           <a:prstGeom prst="rect">
             <a:avLst/>
@@ -6522,7 +6522,7 @@
         <p:spPr>
           <a:xfrm>
             <a:off x="3276600" y="1965960"/>
-            <a:ext cx="2590800" cy="1097280"/>
+            <a:ext cx="2590800" cy="1417320"/>
           </a:xfrm>
           <a:prstGeom prst="rect">
             <a:avLst/>
@@ -6667,7 +6667,7 @@
         <p:spPr>
           <a:xfrm>
             <a:off x="6096000" y="1965960"/>
-            <a:ext cx="2590800" cy="1097280"/>
+            <a:ext cx="2590800" cy="1417320"/>
           </a:xfrm>
           <a:prstGeom prst="rect">
             <a:avLst/>
@@ -7144,7 +7144,7 @@
                 <a:ea typeface="Malgun Gothic" pitchFamily="34" charset="-122"/>
                 <a:cs typeface="Malgun Gothic" pitchFamily="34" charset="-120"/>
               </a:rPr>
-              <a:t>STEP 1 조립</a:t>
+              <a:t>STEP 1 코드 소환</a:t>
             </a:r>
             <a:endParaRPr lang="en-US" sz="1400" dirty="0"/>
           </a:p>
@@ -7159,7 +7159,7 @@
         <p:spPr>
           <a:xfrm>
             <a:off x="457200" y="1874520"/>
-            <a:ext cx="2590800" cy="1097280"/>
+            <a:ext cx="2590800" cy="1417320"/>
           </a:xfrm>
           <a:prstGeom prst="rect">
             <a:avLst/>
@@ -7186,7 +7186,7 @@
                 <a:ea typeface="Malgun Gothic" pitchFamily="34" charset="-122"/>
                 <a:cs typeface="Malgun Gothic" pitchFamily="34" charset="-120"/>
               </a:rPr>
-              <a:t>최대 반복 수(max_loop)와 탈출 기준(break)을 슬라이더로 정한다.</a:t>
+              <a:t>「반복문 &amp; 탈출 조건식 조립」 버튼 → max_epoch 와 stop_point 가 든 for 문이 나타난다.</a:t>
             </a:r>
             <a:endParaRPr lang="en-US" sz="1200" dirty="0"/>
           </a:p>
@@ -7289,7 +7289,7 @@
                 <a:ea typeface="Malgun Gothic" pitchFamily="34" charset="-122"/>
                 <a:cs typeface="Malgun Gothic" pitchFamily="34" charset="-120"/>
               </a:rPr>
-              <a:t>STEP 2 예측</a:t>
+              <a:t>STEP 2 파라미터 적용</a:t>
             </a:r>
             <a:endParaRPr lang="en-US" sz="1400" dirty="0"/>
           </a:p>
@@ -7304,7 +7304,7 @@
         <p:spPr>
           <a:xfrm>
             <a:off x="3276600" y="1874520"/>
-            <a:ext cx="2590800" cy="1097280"/>
+            <a:ext cx="2590800" cy="1417320"/>
           </a:xfrm>
           <a:prstGeom prst="rect">
             <a:avLst/>
@@ -7331,7 +7331,7 @@
                 <a:ea typeface="Malgun Gothic" pitchFamily="34" charset="-122"/>
                 <a:cs typeface="Malgun Gothic" pitchFamily="34" charset="-120"/>
               </a:rPr>
-              <a:t>'정상 학습 중' 이 몇 줄 찍힐까? (break 기준 − 1)</a:t>
+              <a:t>최대 반복 수(10~20)와 조기 탈출 기준(4~12)을 슬라이더로 정하고 「파라미터 적용」. '정상 학습 중' 이 몇 줄 찍힐지 먼저 말한다 (기준 − 1).</a:t>
             </a:r>
             <a:endParaRPr lang="en-US" sz="1200" dirty="0"/>
           </a:p>
@@ -7434,7 +7434,7 @@
                 <a:ea typeface="Malgun Gothic" pitchFamily="34" charset="-122"/>
                 <a:cs typeface="Malgun Gothic" pitchFamily="34" charset="-120"/>
               </a:rPr>
-              <a:t>STEP 3 확인</a:t>
+              <a:t>STEP 3 실행 · 차트</a:t>
             </a:r>
             <a:endParaRPr lang="en-US" sz="1400" dirty="0"/>
           </a:p>
@@ -7449,7 +7449,7 @@
         <p:spPr>
           <a:xfrm>
             <a:off x="6096000" y="1874520"/>
-            <a:ext cx="2590800" cy="1097280"/>
+            <a:ext cx="2590800" cy="1417320"/>
           </a:xfrm>
           <a:prstGeom prst="rect">
             <a:avLst/>
@@ -7476,7 +7476,7 @@
                 <a:ea typeface="Malgun Gothic" pitchFamily="34" charset="-122"/>
                 <a:cs typeface="Malgun Gothic" pitchFamily="34" charset="-120"/>
               </a:rPr>
-              <a:t>차트의 빨간 막대 = break 가 걸린 회차. 점선 = 원래 계획.</a:t>
+              <a:t>「파이프라인 실행」 → 점선 = 원래 계획한 횟수, 파란 막대 = 실제 돈 횟수, 빨간 막대 = break 가 걸린 회차.</a:t>
             </a:r>
             <a:endParaRPr lang="en-US" sz="1200" dirty="0"/>
           </a:p>
